--- a/ablation_insight.pptx
+++ b/ablation_insight.pptx
@@ -6152,7 +6152,7 @@
                 </a:solidFill>
                 <a:latin typeface="Helvetica Neue"/>
               </a:rPr>
-              <a:t>Bold is the best value in a column, underline the second best. P1 + P4 + P5 is that benchmark's error rate. HaluMem P4 and P5 for E3 and E4 are the corrected figures.</a:t>
+              <a:t>Bold is the best value in a column, underline the second best. P1 + P4 + P5 is that benchmark's error rate. HaluMem P4 and P5 for E3 and E4 are the corrected figures. No arm improves HaluMem end-to-end accuracy over E0; the gains are on LoCoMo and on update landing.</a:t>
             </a:r>
           </a:p>
         </p:txBody>
@@ -7906,7 +7906,7 @@
                 </a:solidFill>
                 <a:latin typeface="Helvetica Neue"/>
               </a:rPr>
-              <a:t>M1 alone is the only module that costs nothing.</a:t>
+              <a:t>M1 is the cheapest gain, and the only write-side one.</a:t>
             </a:r>
           </a:p>
         </p:txBody>
@@ -7945,7 +7945,7 @@
                 </a:solidFill>
                 <a:latin typeface="Helvetica Neue"/>
               </a:rPr>
-              <a:t>LoCoMo 0.643 to 0.673, reasoning failure 0.224 to 0.193, the best update landing of the five (0.739), MemFail held at 29 of 35. Storage does not grow, 765 entries against 777, and answer cost does not rise. Nothing regresses anywhere.</a:t>
+              <a:t>LoCoMo 0.643 to 0.673 with reasoning failure 0.224 to 0.193, and the best update landing of the five, 0.739. Coexistence holds at 17 of 20, storage does not grow, 765 entries against 777, and answer cost is flat. The price is 5% more write tokens and HaluMem accuracy, 0.530 to 0.457.</a:t>
             </a:r>
           </a:p>
         </p:txBody>
